--- a/site/clases/parte-1-machine-learning-clasico/093-lle/clase-093-lle-presentacion.pptx
+++ b/site/clases/parte-1-machine-learning-clasico/093-lle/clase-093-lle-presentacion.pptx
@@ -3272,7 +3272,7 @@
                 </a:solidFill>
                 <a:latin typeface="Segoe UI"/>
               </a:rPr>
-              <a:t>Parte: 1 — Machine Learning Clásico · Fuente: Géron, cap. 8.  Duración estimada: 45 min.</a:t>
+              <a:t>Parte: 1 — Machine Learning Clásico · Fuente: Géron, cap. 8.  Duración estimada: 45 min. · Nivel: Intermedio</a:t>
             </a:r>
           </a:p>
         </p:txBody>
@@ -3581,7 +3581,7 @@
                 </a:solidFill>
                 <a:latin typeface="Segoe UI"/>
               </a:rPr>
-              <a:t>Parte: 1 — Machine Learning Clásico · Fuente: Géron, cap. 8.  Duración estimada: 45 min.</a:t>
+              <a:t>Parte: 1 — Machine Learning Clásico · Fuente: Géron, cap. 8.  Duración estimada: 45 min. · Nivel: Intermedio</a:t>
             </a:r>
           </a:p>
         </p:txBody>
@@ -4823,7 +4823,7 @@
                 </a:solidFill>
                 <a:latin typeface="Segoe UI"/>
               </a:rPr>
-              <a:t>Primer bloque ejecutable del notebook.</a:t>
+              <a:t>Manifold curvo 3D coloreado por la coordenada t a lo largo del rollo.</a:t>
             </a:r>
           </a:p>
         </p:txBody>
@@ -4910,7 +4910,235 @@
                 </a:solidFill>
                 <a:latin typeface="Courier New"/>
               </a:rPr>
-              <a:t># Imports y configuración inicial</a:t>
+              <a:t>import numpy as np</a:t>
+            </a:r>
+          </a:p>
+          <a:p>
+            <a:pPr>
+              <a:defRPr sz="1200" b="0">
+                <a:solidFill>
+                  <a:srgbClr val="F8FAFC"/>
+                </a:solidFill>
+                <a:latin typeface="Courier New"/>
+              </a:defRPr>
+            </a:pPr>
+            <a:r>
+              <a:rPr sz="1200" b="0">
+                <a:solidFill>
+                  <a:srgbClr val="F8FAFC"/>
+                </a:solidFill>
+                <a:latin typeface="Courier New"/>
+              </a:rPr>
+              <a:t>import matplotlib.pyplot as plt</a:t>
+            </a:r>
+          </a:p>
+          <a:p>
+            <a:pPr>
+              <a:defRPr sz="1200" b="0">
+                <a:solidFill>
+                  <a:srgbClr val="F8FAFC"/>
+                </a:solidFill>
+                <a:latin typeface="Courier New"/>
+              </a:defRPr>
+            </a:pPr>
+            <a:r>
+              <a:rPr sz="1200" b="0">
+                <a:solidFill>
+                  <a:srgbClr val="F8FAFC"/>
+                </a:solidFill>
+                <a:latin typeface="Courier New"/>
+              </a:rPr>
+              <a:t>from sklearn.datasets import make_swiss_roll</a:t>
+            </a:r>
+          </a:p>
+          <a:p>
+            <a:pPr>
+              <a:defRPr sz="1200" b="0">
+                <a:solidFill>
+                  <a:srgbClr val="F8FAFC"/>
+                </a:solidFill>
+                <a:latin typeface="Courier New"/>
+              </a:defRPr>
+            </a:pPr>
+            <a:r>
+              <a:rPr sz="1200" b="0">
+                <a:solidFill>
+                  <a:srgbClr val="F8FAFC"/>
+                </a:solidFill>
+                <a:latin typeface="Courier New"/>
+              </a:rPr>
+              <a:t> </a:t>
+            </a:r>
+          </a:p>
+          <a:p>
+            <a:pPr>
+              <a:defRPr sz="1200" b="0">
+                <a:solidFill>
+                  <a:srgbClr val="F8FAFC"/>
+                </a:solidFill>
+                <a:latin typeface="Courier New"/>
+              </a:defRPr>
+            </a:pPr>
+            <a:r>
+              <a:rPr sz="1200" b="0">
+                <a:solidFill>
+                  <a:srgbClr val="F8FAFC"/>
+                </a:solidFill>
+                <a:latin typeface="Courier New"/>
+              </a:rPr>
+              <a:t>np.random.seed(42)</a:t>
+            </a:r>
+          </a:p>
+          <a:p>
+            <a:pPr>
+              <a:defRPr sz="1200" b="0">
+                <a:solidFill>
+                  <a:srgbClr val="F8FAFC"/>
+                </a:solidFill>
+                <a:latin typeface="Courier New"/>
+              </a:defRPr>
+            </a:pPr>
+            <a:r>
+              <a:rPr sz="1200" b="0">
+                <a:solidFill>
+                  <a:srgbClr val="F8FAFC"/>
+                </a:solidFill>
+                <a:latin typeface="Courier New"/>
+              </a:rPr>
+              <a:t>X, t = make_swiss_roll(n_samples=1000, noise=0.2, random_state=42)</a:t>
+            </a:r>
+          </a:p>
+          <a:p>
+            <a:pPr>
+              <a:defRPr sz="1200" b="0">
+                <a:solidFill>
+                  <a:srgbClr val="F8FAFC"/>
+                </a:solidFill>
+                <a:latin typeface="Courier New"/>
+              </a:defRPr>
+            </a:pPr>
+            <a:r>
+              <a:rPr sz="1200" b="0">
+                <a:solidFill>
+                  <a:srgbClr val="F8FAFC"/>
+                </a:solidFill>
+                <a:latin typeface="Courier New"/>
+              </a:rPr>
+              <a:t>print("swiss roll:", X.shape, "| t:", t.shape)</a:t>
+            </a:r>
+          </a:p>
+          <a:p>
+            <a:pPr>
+              <a:defRPr sz="1200" b="0">
+                <a:solidFill>
+                  <a:srgbClr val="F8FAFC"/>
+                </a:solidFill>
+                <a:latin typeface="Courier New"/>
+              </a:defRPr>
+            </a:pPr>
+            <a:r>
+              <a:rPr sz="1200" b="0">
+                <a:solidFill>
+                  <a:srgbClr val="F8FAFC"/>
+                </a:solidFill>
+                <a:latin typeface="Courier New"/>
+              </a:rPr>
+              <a:t> </a:t>
+            </a:r>
+          </a:p>
+          <a:p>
+            <a:pPr>
+              <a:defRPr sz="1200" b="0">
+                <a:solidFill>
+                  <a:srgbClr val="F8FAFC"/>
+                </a:solidFill>
+                <a:latin typeface="Courier New"/>
+              </a:defRPr>
+            </a:pPr>
+            <a:r>
+              <a:rPr sz="1200" b="0">
+                <a:solidFill>
+                  <a:srgbClr val="F8FAFC"/>
+                </a:solidFill>
+                <a:latin typeface="Courier New"/>
+              </a:rPr>
+              <a:t>fig = plt.figure(figsize=(7, 5))</a:t>
+            </a:r>
+          </a:p>
+          <a:p>
+            <a:pPr>
+              <a:defRPr sz="1200" b="0">
+                <a:solidFill>
+                  <a:srgbClr val="F8FAFC"/>
+                </a:solidFill>
+                <a:latin typeface="Courier New"/>
+              </a:defRPr>
+            </a:pPr>
+            <a:r>
+              <a:rPr sz="1200" b="0">
+                <a:solidFill>
+                  <a:srgbClr val="F8FAFC"/>
+                </a:solidFill>
+                <a:latin typeface="Courier New"/>
+              </a:rPr>
+              <a:t>ax = fig.add_subplot(111, projection="3d")</a:t>
+            </a:r>
+          </a:p>
+          <a:p>
+            <a:pPr>
+              <a:defRPr sz="1200" b="0">
+                <a:solidFill>
+                  <a:srgbClr val="F8FAFC"/>
+                </a:solidFill>
+                <a:latin typeface="Courier New"/>
+              </a:defRPr>
+            </a:pPr>
+            <a:r>
+              <a:rPr sz="1200" b="0">
+                <a:solidFill>
+                  <a:srgbClr val="F8FAFC"/>
+                </a:solidFill>
+                <a:latin typeface="Courier New"/>
+              </a:rPr>
+              <a:t>ax.scatter(X[:, 0], X[:, 1], X[:, 2], c=t, cmap="Spectral", s=8)</a:t>
+            </a:r>
+          </a:p>
+          <a:p>
+            <a:pPr>
+              <a:defRPr sz="1200" b="0">
+                <a:solidFill>
+                  <a:srgbClr val="F8FAFC"/>
+                </a:solidFill>
+                <a:latin typeface="Courier New"/>
+              </a:defRPr>
+            </a:pPr>
+            <a:r>
+              <a:rPr sz="1200" b="0">
+                <a:solidFill>
+                  <a:srgbClr val="F8FAFC"/>
+                </a:solidFill>
+                <a:latin typeface="Courier New"/>
+              </a:rPr>
+              <a:t>ax.set_title("Swiss roll 3D (color = t)")</a:t>
+            </a:r>
+          </a:p>
+          <a:p>
+            <a:pPr>
+              <a:defRPr sz="1200" b="0">
+                <a:solidFill>
+                  <a:srgbClr val="F8FAFC"/>
+                </a:solidFill>
+                <a:latin typeface="Courier New"/>
+              </a:defRPr>
+            </a:pPr>
+            <a:r>
+              <a:rPr sz="1200" b="0">
+                <a:solidFill>
+                  <a:srgbClr val="F8FAFC"/>
+                </a:solidFill>
+                <a:latin typeface="Courier New"/>
+              </a:rPr>
+              <a:t>plt.tight_layout(); plt.show()</a:t>
             </a:r>
           </a:p>
         </p:txBody>
